--- a/curso_es/pptx/S51.pptx
+++ b/curso_es/pptx/S51.pptx
@@ -4107,7 +4107,7 @@
                 </a:solidFill>
                 <a:latin typeface="Nunito Sans"/>
               </a:rPr>
-              <a:t>Chen sigue a una streamer que parece su amiga: habla de sus problemas, contesta comentarios y dice «sois mi familia». Luego anuncia bebidas energéticas.</a:t>
+              <a:t>Un chico sigue a una streamer que parece su amiga: habla de sus problemas, contesta comentarios y dice «sois mi familia». Luego anuncia bebidas energéticas.</a:t>
             </a:r>
           </a:p>
         </p:txBody>
@@ -4155,7 +4155,7 @@
                 </a:solidFill>
                 <a:latin typeface="Nunito Sans"/>
               </a:rPr>
-              <a:t>¿Por qué funciona? Chen confía en ella como en una amiga.</a:t>
+              <a:t>¿Por qué funciona? Ese chico confía en ella como en una amiga.</a:t>
             </a:r>
           </a:p>
           <a:p>
